--- a/exports/pptx/lessons/senior-module-02-panchabhuta/day-10-final-assessment.pptx
+++ b/exports/pptx/lessons/senior-module-02-panchabhuta/day-10-final-assessment.pptx
@@ -15,9 +15,10 @@
     <p:sldId id="263" r:id="rId9"/>
     <p:sldId id="264" r:id="rId10"/>
     <p:sldId id="265" r:id="rId11"/>
+    <p:sldId id="266" r:id="rId12"/>
   </p:sldIdLst>
   <p:notesMasterIdLst>
-    <p:notesMasterId r:id="rId12"/>
+    <p:notesMasterId r:id="rId13"/>
   </p:notesMasterIdLst>
   <p:sldSz cx="9144000" cy="5143500"/>
   <p:notesSz cx="5143500" cy="9144000"/>
@@ -623,6 +624,94 @@
             <a:fld id="{F7021451-1387-4CA6-816F-3879F97B5CBC}" type="slidenum">
               <a:rPr lang="en-US"/>
               <a:t>10</a:t>
+            </a:fld>
+            <a:endParaRPr lang="en-US"/>
+          </a:p>
+        </p:txBody>
+      </p:sp>
+    </p:spTree>
+    <p:extLst>
+      <p:ext uri="{BB962C8B-B14F-4D97-AF65-F5344CB8AC3E}">
+        <p14:creationId xmlns:p14="http://schemas.microsoft.com/office/powerpoint/2010/main" val="1024086991"/>
+      </p:ext>
+    </p:extLst>
+  </p:cSld>
+  <p:clrMapOvr>
+    <a:masterClrMapping/>
+  </p:clrMapOvr>
+</p:notes>
+</file>
+
+<file path=ppt/notesSlides/notesSlide11.xml><?xml version="1.0" encoding="utf-8"?>
+<p:notes xmlns:a="http://schemas.openxmlformats.org/drawingml/2006/main" xmlns:r="http://schemas.openxmlformats.org/officeDocument/2006/relationships" xmlns:p="http://schemas.openxmlformats.org/presentationml/2006/main">
+  <p:cSld>
+    <p:spTree>
+      <p:nvGrpSpPr>
+        <p:cNvPr id="1" name=""/>
+        <p:cNvGrpSpPr/>
+        <p:nvPr/>
+      </p:nvGrpSpPr>
+      <p:grpSpPr>
+        <a:xfrm>
+          <a:off x="0" y="0"/>
+          <a:ext cx="0" cy="0"/>
+          <a:chOff x="0" y="0"/>
+          <a:chExt cx="0" cy="0"/>
+        </a:xfrm>
+      </p:grpSpPr>
+      <p:sp>
+        <p:nvSpPr>
+          <p:cNvPr id="2" name="Slide Image Placeholder 1"/>
+          <p:cNvSpPr>
+            <a:spLocks noGrp="1" noRot="1" noChangeAspect="1"/>
+          </p:cNvSpPr>
+          <p:nvPr>
+            <p:ph type="sldImg"/>
+          </p:nvPr>
+        </p:nvSpPr>
+        <p:spPr/>
+      </p:sp>
+      <p:sp>
+        <p:nvSpPr>
+          <p:cNvPr id="3" name="Notes Placeholder 2"/>
+          <p:cNvSpPr>
+            <a:spLocks noGrp="1"/>
+          </p:cNvSpPr>
+          <p:nvPr>
+            <p:ph type="body" idx="1"/>
+          </p:nvPr>
+        </p:nvSpPr>
+        <p:spPr/>
+        <p:txBody>
+          <a:bodyPr/>
+          <a:lstStyle/>
+          <a:p>
+            <a:r>
+              <a:rPr lang="en-US" dirty="0"/>
+              <a:t/>
+            </a:r>
+            <a:endParaRPr lang="en-US" dirty="0"/>
+          </a:p>
+        </p:txBody>
+      </p:sp>
+      <p:sp>
+        <p:nvSpPr>
+          <p:cNvPr id="4" name="Slide Number Placeholder 3"/>
+          <p:cNvSpPr>
+            <a:spLocks noGrp="1"/>
+          </p:cNvSpPr>
+          <p:nvPr>
+            <p:ph type="sldNum" sz="quarter" idx="10"/>
+          </p:nvPr>
+        </p:nvSpPr>
+        <p:spPr/>
+        <p:txBody>
+          <a:bodyPr/>
+          <a:lstStyle/>
+          <a:p>
+            <a:fld id="{F7021451-1387-4CA6-816F-3879F97B5CBC}" type="slidenum">
+              <a:rPr lang="en-US"/>
+              <a:t>11</a:t>
             </a:fld>
             <a:endParaRPr lang="en-US"/>
           </a:p>
@@ -1876,102 +1965,6 @@
         </p:nvSpPr>
         <p:spPr>
           <a:xfrm>
-            <a:off x="406301" y="1223963"/>
-            <a:ext cx="8498026" cy="274290"/>
-          </a:xfrm>
-          <a:prstGeom prst="rect">
-            <a:avLst/>
-          </a:prstGeom>
-          <a:noFill/>
-          <a:ln/>
-        </p:spPr>
-        <p:txBody>
-          <a:bodyPr wrap="square" lIns="0" tIns="0" rIns="0" bIns="0" rtlCol="0" anchor="t"/>
-          <a:lstStyle/>
-          <a:p>
-            <a:pPr algn="l" indent="0" marL="0">
-              <a:lnSpc>
-                <a:spcPts val="2160"/>
-              </a:lnSpc>
-              <a:spcBef>
-                <a:spcPts val="600"/>
-              </a:spcBef>
-              <a:spcAft>
-                <a:spcPts val="800"/>
-              </a:spcAft>
-              <a:buNone/>
-            </a:pPr>
-            <a:r>
-              <a:rPr lang="en-US" sz="1800" b="1" dirty="0">
-                <a:solidFill>
-                  <a:srgbClr val="997929"/>
-                </a:solidFill>
-                <a:latin typeface="Times New Roman" pitchFamily="34" charset="0"/>
-                <a:ea typeface="Times New Roman" pitchFamily="34" charset="-122"/>
-                <a:cs typeface="Times New Roman" pitchFamily="34" charset="-120"/>
-              </a:rPr>
-              <a:t>Learning objective</a:t>
-            </a:r>
-            <a:endParaRPr lang="en-US" sz="1800" dirty="0"/>
-          </a:p>
-        </p:txBody>
-      </p:sp>
-      <p:sp>
-        <p:nvSpPr>
-          <p:cNvPr id="6" name="Text 4"/>
-          <p:cNvSpPr/>
-          <p:nvPr/>
-        </p:nvSpPr>
-        <p:spPr>
-          <a:xfrm>
-            <a:off x="406301" y="1637854"/>
-            <a:ext cx="8498026" cy="213271"/>
-          </a:xfrm>
-          <a:prstGeom prst="rect">
-            <a:avLst/>
-          </a:prstGeom>
-          <a:noFill/>
-          <a:ln/>
-        </p:spPr>
-        <p:txBody>
-          <a:bodyPr wrap="square" lIns="0" tIns="0" rIns="0" bIns="0" rtlCol="0" anchor="t"/>
-          <a:lstStyle/>
-          <a:p>
-            <a:pPr algn="l" indent="0" marL="0">
-              <a:lnSpc>
-                <a:spcPts val="1680"/>
-              </a:lnSpc>
-              <a:spcBef>
-                <a:spcPts val="300"/>
-              </a:spcBef>
-              <a:spcAft>
-                <a:spcPts val="300"/>
-              </a:spcAft>
-              <a:buNone/>
-            </a:pPr>
-            <a:r>
-              <a:rPr lang="en-US" sz="1200" dirty="0">
-                <a:solidFill>
-                  <a:srgbClr val="1A1A1A"/>
-                </a:solidFill>
-                <a:latin typeface="Georgia" pitchFamily="34" charset="0"/>
-                <a:ea typeface="Georgia" pitchFamily="34" charset="-122"/>
-                <a:cs typeface="Georgia" pitchFamily="34" charset="-120"/>
-              </a:rPr>
-              <a:t>Students complete the summative quiz and submit their 5-page argumentative paper.</a:t>
-            </a:r>
-            <a:endParaRPr lang="en-US" sz="1200" dirty="0"/>
-          </a:p>
-        </p:txBody>
-      </p:sp>
-      <p:sp>
-        <p:nvSpPr>
-          <p:cNvPr id="7" name="Text 5"/>
-          <p:cNvSpPr/>
-          <p:nvPr/>
-        </p:nvSpPr>
-        <p:spPr>
-          <a:xfrm>
             <a:off x="406301" y="4434929"/>
             <a:ext cx="8498026" cy="213271"/>
           </a:xfrm>
@@ -2116,7 +2109,7 @@
                 <a:ea typeface="Times New Roman" pitchFamily="34" charset="-122"/>
                 <a:cs typeface="Times New Roman" pitchFamily="34" charset="-120"/>
               </a:rPr>
-              <a:t>Citation(s) used</a:t>
+              <a:t>Teacher notes</a:t>
             </a:r>
             <a:endParaRPr lang="en-US" sz="1800" dirty="0"/>
           </a:p>
@@ -2130,8 +2123,8 @@
         </p:nvSpPr>
         <p:spPr>
           <a:xfrm>
-            <a:off x="406301" y="870942"/>
-            <a:ext cx="8498026" cy="213271"/>
+            <a:off x="634901" y="883593"/>
+            <a:ext cx="8102798" cy="731341"/>
           </a:xfrm>
           <a:prstGeom prst="rect">
             <a:avLst/>
@@ -2143,17 +2136,15 @@
           <a:bodyPr wrap="square" lIns="0" tIns="0" rIns="0" bIns="0" rtlCol="0" anchor="t"/>
           <a:lstStyle/>
           <a:p>
-            <a:pPr algn="l" indent="0" marL="0">
-              <a:lnSpc>
-                <a:spcPts val="1680"/>
-              </a:lnSpc>
-              <a:spcBef>
-                <a:spcPts val="300"/>
-              </a:spcBef>
-              <a:spcAft>
-                <a:spcPts val="300"/>
-              </a:spcAft>
-              <a:buNone/>
+            <a:pPr algn="l" marL="342900" indent="-342900">
+              <a:lnSpc>
+                <a:spcPts val="1620"/>
+              </a:lnSpc>
+              <a:spcAft>
+                <a:spcPts val="300"/>
+              </a:spcAft>
+              <a:buSzPct val="100000"/>
+              <a:buChar char="•"/>
             </a:pPr>
             <a:r>
               <a:rPr lang="en-US" sz="1200" dirty="0">
@@ -2164,7 +2155,235 @@
                 <a:ea typeface="Georgia" pitchFamily="34" charset="-122"/>
                 <a:cs typeface="Georgia" pitchFamily="34" charset="-120"/>
               </a:rPr>
-              <a:t>– All sources verified.</a:t>
+              <a:t>Mark papers in two passes: first pass for clarity and structure; second pass for source quality and counter-argument fairness.</a:t>
+            </a:r>
+            <a:endParaRPr lang="en-US" sz="1200" dirty="0"/>
+          </a:p>
+          <a:p>
+            <a:pPr algn="l" marL="342900" indent="-342900">
+              <a:lnSpc>
+                <a:spcPts val="1620"/>
+              </a:lnSpc>
+              <a:spcAft>
+                <a:spcPts val="300"/>
+              </a:spcAft>
+              <a:buSzPct val="100000"/>
+              <a:buChar char="•"/>
+            </a:pPr>
+            <a:r>
+              <a:rPr lang="en-US" sz="1200" dirty="0">
+                <a:solidFill>
+                  <a:srgbClr val="1A1A1A"/>
+                </a:solidFill>
+                <a:latin typeface="Georgia" pitchFamily="34" charset="0"/>
+                <a:ea typeface="Georgia" pitchFamily="34" charset="-122"/>
+                <a:cs typeface="Georgia" pitchFamily="34" charset="-120"/>
+              </a:rPr>
+              <a:t>Return marked papers within 5 school days with detailed comments.</a:t>
+            </a:r>
+            <a:endParaRPr lang="en-US" sz="1200" dirty="0"/>
+          </a:p>
+        </p:txBody>
+      </p:sp>
+      <p:sp>
+        <p:nvSpPr>
+          <p:cNvPr id="5" name="Text 3"/>
+          <p:cNvSpPr/>
+          <p:nvPr/>
+        </p:nvSpPr>
+        <p:spPr>
+          <a:xfrm>
+            <a:off x="406301" y="4434929"/>
+            <a:ext cx="8498026" cy="213271"/>
+          </a:xfrm>
+          <a:prstGeom prst="rect">
+            <a:avLst/>
+          </a:prstGeom>
+          <a:noFill/>
+          <a:ln/>
+        </p:spPr>
+        <p:txBody>
+          <a:bodyPr wrap="square" lIns="0" tIns="0" rIns="0" bIns="0" rtlCol="0" anchor="t"/>
+          <a:lstStyle/>
+          <a:p>
+            <a:pPr algn="l" indent="0" marL="0">
+              <a:lnSpc>
+                <a:spcPts val="1680"/>
+              </a:lnSpc>
+              <a:spcBef>
+                <a:spcPts val="300"/>
+              </a:spcBef>
+              <a:spcAft>
+                <a:spcPts val="300"/>
+              </a:spcAft>
+              <a:buNone/>
+            </a:pPr>
+            <a:r>
+              <a:rPr lang="en-US" sz="1200" dirty="0">
+                <a:solidFill>
+                  <a:srgbClr val="1A1A1A"/>
+                </a:solidFill>
+                <a:latin typeface="Georgia" pitchFamily="34" charset="0"/>
+                <a:ea typeface="Georgia" pitchFamily="34" charset="-122"/>
+                <a:cs typeface="Georgia" pitchFamily="34" charset="-120"/>
+              </a:rPr>
+              <a:t>Senior ·  · IKS Curriculum</a:t>
+            </a:r>
+            <a:endParaRPr lang="en-US" sz="1200" dirty="0"/>
+          </a:p>
+        </p:txBody>
+      </p:sp>
+    </p:spTree>
+  </p:cSld>
+  <p:clrMapOvr>
+    <a:masterClrMapping/>
+  </p:clrMapOvr>
+</p:sld>
+</file>
+
+<file path=ppt/slides/slide11.xml><?xml version="1.0" encoding="utf-8"?>
+<p:sld xmlns:a="http://schemas.openxmlformats.org/drawingml/2006/main" xmlns:r="http://schemas.openxmlformats.org/officeDocument/2006/relationships" xmlns:p="http://schemas.openxmlformats.org/presentationml/2006/main">
+  <p:cSld name="Slide 11">
+    <p:bg>
+      <p:bgPr>
+        <a:solidFill>
+          <a:srgbClr val="FAF7F2"/>
+        </a:solidFill>
+      </p:bgPr>
+    </p:bg>
+    <p:spTree>
+      <p:nvGrpSpPr>
+        <p:cNvPr id="1" name=""/>
+        <p:cNvGrpSpPr/>
+        <p:nvPr/>
+      </p:nvGrpSpPr>
+      <p:grpSpPr>
+        <a:xfrm>
+          <a:off x="0" y="0"/>
+          <a:ext cx="0" cy="0"/>
+          <a:chOff x="0" y="0"/>
+          <a:chExt cx="0" cy="0"/>
+        </a:xfrm>
+      </p:grpSpPr>
+      <p:sp>
+        <p:nvSpPr>
+          <p:cNvPr id="2" name="Text 0"/>
+          <p:cNvSpPr/>
+          <p:nvPr/>
+        </p:nvSpPr>
+        <p:spPr>
+          <a:xfrm>
+            <a:off x="0" y="0"/>
+            <a:ext cx="9144000" cy="101501"/>
+          </a:xfrm>
+          <a:prstGeom prst="rect">
+            <a:avLst/>
+          </a:prstGeom>
+          <a:solidFill>
+            <a:srgbClr val="5D1D2E"/>
+          </a:solidFill>
+          <a:ln/>
+        </p:spPr>
+        <p:txBody>
+          <a:bodyPr wrap="square" rtlCol="0" anchor="ctr"/>
+          <a:lstStyle/>
+          <a:p>
+            <a:pPr indent="0" marL="0">
+              <a:buNone/>
+            </a:pPr>
+            <a:endParaRPr lang="en-US" dirty="0"/>
+          </a:p>
+        </p:txBody>
+      </p:sp>
+      <p:sp>
+        <p:nvSpPr>
+          <p:cNvPr id="3" name="Text 1"/>
+          <p:cNvSpPr/>
+          <p:nvPr/>
+        </p:nvSpPr>
+        <p:spPr>
+          <a:xfrm>
+            <a:off x="406301" y="457051"/>
+            <a:ext cx="8498026" cy="274290"/>
+          </a:xfrm>
+          <a:prstGeom prst="rect">
+            <a:avLst/>
+          </a:prstGeom>
+          <a:noFill/>
+          <a:ln/>
+        </p:spPr>
+        <p:txBody>
+          <a:bodyPr wrap="square" lIns="0" tIns="0" rIns="0" bIns="0" rtlCol="0" anchor="t"/>
+          <a:lstStyle/>
+          <a:p>
+            <a:pPr algn="l" indent="0" marL="0">
+              <a:lnSpc>
+                <a:spcPts val="2160"/>
+              </a:lnSpc>
+              <a:spcBef>
+                <a:spcPts val="600"/>
+              </a:spcBef>
+              <a:spcAft>
+                <a:spcPts val="800"/>
+              </a:spcAft>
+              <a:buNone/>
+            </a:pPr>
+            <a:r>
+              <a:rPr lang="en-US" sz="1800" b="1" dirty="0">
+                <a:solidFill>
+                  <a:srgbClr val="997929"/>
+                </a:solidFill>
+                <a:latin typeface="Times New Roman" pitchFamily="34" charset="0"/>
+                <a:ea typeface="Times New Roman" pitchFamily="34" charset="-122"/>
+                <a:cs typeface="Times New Roman" pitchFamily="34" charset="-120"/>
+              </a:rPr>
+              <a:t>Citation(s) used</a:t>
+            </a:r>
+            <a:endParaRPr lang="en-US" sz="1800" dirty="0"/>
+          </a:p>
+        </p:txBody>
+      </p:sp>
+      <p:sp>
+        <p:nvSpPr>
+          <p:cNvPr id="4" name="Text 2"/>
+          <p:cNvSpPr/>
+          <p:nvPr/>
+        </p:nvSpPr>
+        <p:spPr>
+          <a:xfrm>
+            <a:off x="634901" y="883593"/>
+            <a:ext cx="8102798" cy="281880"/>
+          </a:xfrm>
+          <a:prstGeom prst="rect">
+            <a:avLst/>
+          </a:prstGeom>
+          <a:noFill/>
+          <a:ln/>
+        </p:spPr>
+        <p:txBody>
+          <a:bodyPr wrap="square" lIns="0" tIns="0" rIns="0" bIns="0" rtlCol="0" anchor="t"/>
+          <a:lstStyle/>
+          <a:p>
+            <a:pPr algn="l" marL="342900" indent="-342900">
+              <a:lnSpc>
+                <a:spcPts val="1620"/>
+              </a:lnSpc>
+              <a:spcAft>
+                <a:spcPts val="300"/>
+              </a:spcAft>
+              <a:buSzPct val="100000"/>
+              <a:buChar char="•"/>
+            </a:pPr>
+            <a:r>
+              <a:rPr lang="en-US" sz="1200" dirty="0">
+                <a:solidFill>
+                  <a:srgbClr val="1A1A1A"/>
+                </a:solidFill>
+                <a:latin typeface="Georgia" pitchFamily="34" charset="0"/>
+                <a:ea typeface="Georgia" pitchFamily="34" charset="-122"/>
+                <a:cs typeface="Georgia" pitchFamily="34" charset="-120"/>
+              </a:rPr>
+              <a:t>All sources verified.</a:t>
             </a:r>
             <a:endParaRPr lang="en-US" sz="1200" dirty="0"/>
           </a:p>
@@ -2322,7 +2541,7 @@
                 <a:ea typeface="Times New Roman" pitchFamily="34" charset="-122"/>
                 <a:cs typeface="Times New Roman" pitchFamily="34" charset="-120"/>
               </a:rPr>
-              <a:t>Materials</a:t>
+              <a:t>Learning objective</a:t>
             </a:r>
             <a:endParaRPr lang="en-US" sz="1800" dirty="0"/>
           </a:p>
@@ -2337,7 +2556,7 @@
         <p:spPr>
           <a:xfrm>
             <a:off x="406301" y="870942"/>
-            <a:ext cx="8498026" cy="222796"/>
+            <a:ext cx="8498026" cy="213271"/>
           </a:xfrm>
           <a:prstGeom prst="rect">
             <a:avLst/>
@@ -2370,53 +2589,7 @@
                 <a:ea typeface="Georgia" pitchFamily="34" charset="-122"/>
                 <a:cs typeface="Georgia" pitchFamily="34" charset="-120"/>
               </a:rPr>
-              <a:t>– Summative quiz (</a:t>
-            </a:r>
-            <a:pPr algn="l" indent="0" marL="0">
-              <a:lnSpc>
-                <a:spcPts val="1680"/>
-              </a:lnSpc>
-              <a:spcBef>
-                <a:spcPts val="300"/>
-              </a:spcBef>
-              <a:spcAft>
-                <a:spcPts val="300"/>
-              </a:spcAft>
-              <a:buNone/>
-            </a:pPr>
-            <a:r>
-              <a:rPr lang="en-US" sz="1200" dirty="0">
-                <a:solidFill>
-                  <a:srgbClr val="1A1A1A"/>
-                </a:solidFill>
-                <a:latin typeface="Georgia" pitchFamily="34" charset="0"/>
-                <a:ea typeface="Georgia" pitchFamily="34" charset="-122"/>
-                <a:cs typeface="Georgia" pitchFamily="34" charset="-120"/>
-              </a:rPr>
-              <a:t>quizzes/summative.md</a:t>
-            </a:r>
-            <a:pPr algn="l" indent="0" marL="0">
-              <a:lnSpc>
-                <a:spcPts val="1680"/>
-              </a:lnSpc>
-              <a:spcBef>
-                <a:spcPts val="300"/>
-              </a:spcBef>
-              <a:spcAft>
-                <a:spcPts val="300"/>
-              </a:spcAft>
-              <a:buNone/>
-            </a:pPr>
-            <a:r>
-              <a:rPr lang="en-US" sz="1200" dirty="0">
-                <a:solidFill>
-                  <a:srgbClr val="1A1A1A"/>
-                </a:solidFill>
-                <a:latin typeface="Georgia" pitchFamily="34" charset="0"/>
-                <a:ea typeface="Georgia" pitchFamily="34" charset="-122"/>
-                <a:cs typeface="Georgia" pitchFamily="34" charset="-120"/>
-              </a:rPr>
-              <a:t>) – Stopwatch</a:t>
+              <a:t>Students complete the summative quiz and submit their 5-page argumentative paper.</a:t>
             </a:r>
             <a:endParaRPr lang="en-US" sz="1200" dirty="0"/>
           </a:p>
@@ -2574,7 +2747,7 @@
                 <a:ea typeface="Times New Roman" pitchFamily="34" charset="-122"/>
                 <a:cs typeface="Times New Roman" pitchFamily="34" charset="-120"/>
               </a:rPr>
-              <a:t>Flow</a:t>
+              <a:t>Materials</a:t>
             </a:r>
             <a:endParaRPr lang="en-US" sz="1800" dirty="0"/>
           </a:p>
@@ -2583,6 +2756,116 @@
       <p:sp>
         <p:nvSpPr>
           <p:cNvPr id="4" name="Text 2"/>
+          <p:cNvSpPr/>
+          <p:nvPr/>
+        </p:nvSpPr>
+        <p:spPr>
+          <a:xfrm>
+            <a:off x="634901" y="883593"/>
+            <a:ext cx="8102798" cy="544711"/>
+          </a:xfrm>
+          <a:prstGeom prst="rect">
+            <a:avLst/>
+          </a:prstGeom>
+          <a:noFill/>
+          <a:ln/>
+        </p:spPr>
+        <p:txBody>
+          <a:bodyPr wrap="square" lIns="0" tIns="0" rIns="0" bIns="0" rtlCol="0" anchor="t"/>
+          <a:lstStyle/>
+          <a:p>
+            <a:pPr algn="l" marL="342900" indent="-342900">
+              <a:lnSpc>
+                <a:spcPts val="1620"/>
+              </a:lnSpc>
+              <a:spcAft>
+                <a:spcPts val="300"/>
+              </a:spcAft>
+              <a:buSzPct val="100000"/>
+              <a:buChar char="•"/>
+            </a:pPr>
+            <a:r>
+              <a:rPr lang="en-US" sz="1200" dirty="0">
+                <a:solidFill>
+                  <a:srgbClr val="1A1A1A"/>
+                </a:solidFill>
+                <a:latin typeface="Georgia" pitchFamily="34" charset="0"/>
+                <a:ea typeface="Georgia" pitchFamily="34" charset="-122"/>
+                <a:cs typeface="Georgia" pitchFamily="34" charset="-120"/>
+              </a:rPr>
+              <a:t>Summative quiz (</a:t>
+            </a:r>
+            <a:pPr algn="l" indent="0" marL="0">
+              <a:lnSpc>
+                <a:spcPts val="1620"/>
+              </a:lnSpc>
+              <a:spcAft>
+                <a:spcPts val="300"/>
+              </a:spcAft>
+              <a:buNone/>
+            </a:pPr>
+            <a:r>
+              <a:rPr lang="en-US" sz="1200" dirty="0">
+                <a:solidFill>
+                  <a:srgbClr val="1A1A1A"/>
+                </a:solidFill>
+                <a:latin typeface="Georgia" pitchFamily="34" charset="0"/>
+                <a:ea typeface="Georgia" pitchFamily="34" charset="-122"/>
+                <a:cs typeface="Georgia" pitchFamily="34" charset="-120"/>
+              </a:rPr>
+              <a:t>quizzes/summative.md</a:t>
+            </a:r>
+            <a:pPr algn="l" indent="0" marL="0">
+              <a:lnSpc>
+                <a:spcPts val="1620"/>
+              </a:lnSpc>
+              <a:spcAft>
+                <a:spcPts val="300"/>
+              </a:spcAft>
+              <a:buNone/>
+            </a:pPr>
+            <a:r>
+              <a:rPr lang="en-US" sz="1200" dirty="0">
+                <a:solidFill>
+                  <a:srgbClr val="1A1A1A"/>
+                </a:solidFill>
+                <a:latin typeface="Georgia" pitchFamily="34" charset="0"/>
+                <a:ea typeface="Georgia" pitchFamily="34" charset="-122"/>
+                <a:cs typeface="Georgia" pitchFamily="34" charset="-120"/>
+              </a:rPr>
+              <a:t>)</a:t>
+            </a:r>
+            <a:endParaRPr lang="en-US" sz="1200" dirty="0"/>
+          </a:p>
+          <a:p>
+            <a:pPr algn="l" marL="342900" indent="-342900">
+              <a:lnSpc>
+                <a:spcPts val="1620"/>
+              </a:lnSpc>
+              <a:spcAft>
+                <a:spcPts val="300"/>
+              </a:spcAft>
+              <a:buSzPct val="100000"/>
+              <a:buChar char="•"/>
+            </a:pPr>
+            <a:r>
+              <a:rPr lang="en-US" sz="1200" dirty="0">
+                <a:solidFill>
+                  <a:srgbClr val="1A1A1A"/>
+                </a:solidFill>
+                <a:latin typeface="Georgia" pitchFamily="34" charset="0"/>
+                <a:ea typeface="Georgia" pitchFamily="34" charset="-122"/>
+                <a:cs typeface="Georgia" pitchFamily="34" charset="-120"/>
+              </a:rPr>
+              <a:t>Stopwatch</a:t>
+            </a:r>
+            <a:endParaRPr lang="en-US" sz="1200" dirty="0"/>
+          </a:p>
+        </p:txBody>
+      </p:sp>
+      <p:sp>
+        <p:nvSpPr>
+          <p:cNvPr id="5" name="Text 3"/>
           <p:cNvSpPr/>
           <p:nvPr/>
         </p:nvSpPr>
@@ -2732,7 +3015,7 @@
                 <a:ea typeface="Times New Roman" pitchFamily="34" charset="-122"/>
                 <a:cs typeface="Times New Roman" pitchFamily="34" charset="-120"/>
               </a:rPr>
-              <a:t>Quiz (35 min)</a:t>
+              <a:t>Flow</a:t>
             </a:r>
             <a:endParaRPr lang="en-US" sz="1800" dirty="0"/>
           </a:p>
@@ -2741,54 +3024,6 @@
       <p:sp>
         <p:nvSpPr>
           <p:cNvPr id="4" name="Text 2"/>
-          <p:cNvSpPr/>
-          <p:nvPr/>
-        </p:nvSpPr>
-        <p:spPr>
-          <a:xfrm>
-            <a:off x="406301" y="870942"/>
-            <a:ext cx="8498026" cy="426541"/>
-          </a:xfrm>
-          <a:prstGeom prst="rect">
-            <a:avLst/>
-          </a:prstGeom>
-          <a:noFill/>
-          <a:ln/>
-        </p:spPr>
-        <p:txBody>
-          <a:bodyPr wrap="square" lIns="0" tIns="0" rIns="0" bIns="0" rtlCol="0" anchor="t"/>
-          <a:lstStyle/>
-          <a:p>
-            <a:pPr algn="l" indent="0" marL="0">
-              <a:lnSpc>
-                <a:spcPts val="1680"/>
-              </a:lnSpc>
-              <a:spcBef>
-                <a:spcPts val="300"/>
-              </a:spcBef>
-              <a:spcAft>
-                <a:spcPts val="300"/>
-              </a:spcAft>
-              <a:buNone/>
-            </a:pPr>
-            <a:r>
-              <a:rPr lang="en-US" sz="1200" dirty="0">
-                <a:solidFill>
-                  <a:srgbClr val="1A1A1A"/>
-                </a:solidFill>
-                <a:latin typeface="Georgia" pitchFamily="34" charset="0"/>
-                <a:ea typeface="Georgia" pitchFamily="34" charset="-122"/>
-                <a:cs typeface="Georgia" pitchFamily="34" charset="-120"/>
-              </a:rPr>
-              <a:t>– Distribute. Closed-book. – 35 marks. Multiple choice, short answer, primary-source reading question, comparison question, open response.</a:t>
-            </a:r>
-            <a:endParaRPr lang="en-US" sz="1200" dirty="0"/>
-          </a:p>
-        </p:txBody>
-      </p:sp>
-      <p:sp>
-        <p:nvSpPr>
-          <p:cNvPr id="5" name="Text 3"/>
           <p:cNvSpPr/>
           <p:nvPr/>
         </p:nvSpPr>
@@ -2938,7 +3173,7 @@
                 <a:ea typeface="Times New Roman" pitchFamily="34" charset="-122"/>
                 <a:cs typeface="Times New Roman" pitchFamily="34" charset="-120"/>
               </a:rPr>
-              <a:t>Paper submission (10 min)</a:t>
+              <a:t>Quiz (35 min)</a:t>
             </a:r>
             <a:endParaRPr lang="en-US" sz="1800" dirty="0"/>
           </a:p>
@@ -2952,8 +3187,8 @@
         </p:nvSpPr>
         <p:spPr>
           <a:xfrm>
-            <a:off x="406301" y="870942"/>
-            <a:ext cx="8498026" cy="639812"/>
+            <a:off x="634901" y="883593"/>
+            <a:ext cx="8102798" cy="525661"/>
           </a:xfrm>
           <a:prstGeom prst="rect">
             <a:avLst/>
@@ -2965,17 +3200,15 @@
           <a:bodyPr wrap="square" lIns="0" tIns="0" rIns="0" bIns="0" rtlCol="0" anchor="t"/>
           <a:lstStyle/>
           <a:p>
-            <a:pPr algn="l" indent="0" marL="0">
-              <a:lnSpc>
-                <a:spcPts val="1680"/>
-              </a:lnSpc>
-              <a:spcBef>
-                <a:spcPts val="300"/>
-              </a:spcBef>
-              <a:spcAft>
-                <a:spcPts val="300"/>
-              </a:spcAft>
-              <a:buNone/>
+            <a:pPr algn="l" marL="342900" indent="-342900">
+              <a:lnSpc>
+                <a:spcPts val="1620"/>
+              </a:lnSpc>
+              <a:spcAft>
+                <a:spcPts val="300"/>
+              </a:spcAft>
+              <a:buSzPct val="100000"/>
+              <a:buChar char="•"/>
             </a:pPr>
             <a:r>
               <a:rPr lang="en-US" sz="1200" dirty="0">
@@ -2986,7 +3219,31 @@
                 <a:ea typeface="Georgia" pitchFamily="34" charset="-122"/>
                 <a:cs typeface="Georgia" pitchFamily="34" charset="-120"/>
               </a:rPr>
-              <a:t>– Hand in printed papers (or upload digitally). – Teacher quick-checks each for:   – Title page with name + thesis   – Page count (4.5–5.5 pages target)   – Works-cited page with at least 3 sources – Any paper missing a piece is flagged for late penalty.</a:t>
+              <a:t>Distribute. Closed-book.</a:t>
+            </a:r>
+            <a:endParaRPr lang="en-US" sz="1200" dirty="0"/>
+          </a:p>
+          <a:p>
+            <a:pPr algn="l" marL="342900" indent="-342900">
+              <a:lnSpc>
+                <a:spcPts val="1620"/>
+              </a:lnSpc>
+              <a:spcAft>
+                <a:spcPts val="300"/>
+              </a:spcAft>
+              <a:buSzPct val="100000"/>
+              <a:buChar char="•"/>
+            </a:pPr>
+            <a:r>
+              <a:rPr lang="en-US" sz="1200" dirty="0">
+                <a:solidFill>
+                  <a:srgbClr val="1A1A1A"/>
+                </a:solidFill>
+                <a:latin typeface="Georgia" pitchFamily="34" charset="0"/>
+                <a:ea typeface="Georgia" pitchFamily="34" charset="-122"/>
+                <a:cs typeface="Georgia" pitchFamily="34" charset="-120"/>
+              </a:rPr>
+              <a:t>35 marks. Multiple choice, short answer, primary-source reading question, comparison question, open response.</a:t>
             </a:r>
             <a:endParaRPr lang="en-US" sz="1200" dirty="0"/>
           </a:p>
@@ -3144,7 +3401,7 @@
                 <a:ea typeface="Times New Roman" pitchFamily="34" charset="-122"/>
                 <a:cs typeface="Times New Roman" pitchFamily="34" charset="-120"/>
               </a:rPr>
-              <a:t>Wrap-up</a:t>
+              <a:t>Paper submission (10 min)</a:t>
             </a:r>
             <a:endParaRPr lang="en-US" sz="1800" dirty="0"/>
           </a:p>
@@ -3158,8 +3415,8 @@
         </p:nvSpPr>
         <p:spPr>
           <a:xfrm>
-            <a:off x="406301" y="870942"/>
-            <a:ext cx="8498026" cy="222796"/>
+            <a:off x="634901" y="883593"/>
+            <a:ext cx="8102798" cy="1500783"/>
           </a:xfrm>
           <a:prstGeom prst="rect">
             <a:avLst/>
@@ -3171,17 +3428,15 @@
           <a:bodyPr wrap="square" lIns="0" tIns="0" rIns="0" bIns="0" rtlCol="0" anchor="t"/>
           <a:lstStyle/>
           <a:p>
-            <a:pPr algn="l" indent="0" marL="0">
-              <a:lnSpc>
-                <a:spcPts val="1680"/>
-              </a:lnSpc>
-              <a:spcBef>
-                <a:spcPts val="300"/>
-              </a:spcBef>
-              <a:spcAft>
-                <a:spcPts val="300"/>
-              </a:spcAft>
-              <a:buNone/>
+            <a:pPr algn="l" marL="342900" indent="-342900">
+              <a:lnSpc>
+                <a:spcPts val="1620"/>
+              </a:lnSpc>
+              <a:spcAft>
+                <a:spcPts val="300"/>
+              </a:spcAft>
+              <a:buSzPct val="100000"/>
+              <a:buChar char="•"/>
             </a:pPr>
             <a:r>
               <a:rPr lang="en-US" sz="1200" dirty="0">
@@ -3192,19 +3447,20 @@
                 <a:ea typeface="Georgia" pitchFamily="34" charset="-122"/>
                 <a:cs typeface="Georgia" pitchFamily="34" charset="-120"/>
               </a:rPr>
-              <a:t>– Brief class closure. – Reflection slip submitted (3 questions from </a:t>
-            </a:r>
-            <a:pPr algn="l" indent="0" marL="0">
-              <a:lnSpc>
-                <a:spcPts val="1680"/>
-              </a:lnSpc>
-              <a:spcBef>
-                <a:spcPts val="300"/>
-              </a:spcBef>
-              <a:spcAft>
-                <a:spcPts val="300"/>
-              </a:spcAft>
-              <a:buNone/>
+              <a:t>Hand in printed papers (or upload digitally).</a:t>
+            </a:r>
+            <a:endParaRPr lang="en-US" sz="1200" dirty="0"/>
+          </a:p>
+          <a:p>
+            <a:pPr algn="l" marL="342900" indent="-342900">
+              <a:lnSpc>
+                <a:spcPts val="1620"/>
+              </a:lnSpc>
+              <a:spcAft>
+                <a:spcPts val="300"/>
+              </a:spcAft>
+              <a:buSzPct val="100000"/>
+              <a:buChar char="•"/>
             </a:pPr>
             <a:r>
               <a:rPr lang="en-US" sz="1200" dirty="0">
@@ -3215,19 +3471,20 @@
                 <a:ea typeface="Georgia" pitchFamily="34" charset="-122"/>
                 <a:cs typeface="Georgia" pitchFamily="34" charset="-120"/>
               </a:rPr>
-              <a:t>assessments/project-brief.md</a:t>
-            </a:r>
-            <a:pPr algn="l" indent="0" marL="0">
-              <a:lnSpc>
-                <a:spcPts val="1680"/>
-              </a:lnSpc>
-              <a:spcBef>
-                <a:spcPts val="300"/>
-              </a:spcBef>
-              <a:spcAft>
-                <a:spcPts val="300"/>
-              </a:spcAft>
-              <a:buNone/>
+              <a:t>Teacher quick-checks each for:</a:t>
+            </a:r>
+            <a:endParaRPr lang="en-US" sz="1200" dirty="0"/>
+          </a:p>
+          <a:p>
+            <a:pPr algn="l" marL="342900" indent="-342900">
+              <a:lnSpc>
+                <a:spcPts val="1620"/>
+              </a:lnSpc>
+              <a:spcAft>
+                <a:spcPts val="300"/>
+              </a:spcAft>
+              <a:buSzPct val="100000"/>
+              <a:buChar char="•"/>
             </a:pPr>
             <a:r>
               <a:rPr lang="en-US" sz="1200" dirty="0">
@@ -3238,7 +3495,79 @@
                 <a:ea typeface="Georgia" pitchFamily="34" charset="-122"/>
                 <a:cs typeface="Georgia" pitchFamily="34" charset="-120"/>
               </a:rPr>
-              <a:t>).</a:t>
+              <a:t>Title page with name + thesis</a:t>
+            </a:r>
+            <a:endParaRPr lang="en-US" sz="1200" dirty="0"/>
+          </a:p>
+          <a:p>
+            <a:pPr algn="l" marL="342900" indent="-342900">
+              <a:lnSpc>
+                <a:spcPts val="1620"/>
+              </a:lnSpc>
+              <a:spcAft>
+                <a:spcPts val="300"/>
+              </a:spcAft>
+              <a:buSzPct val="100000"/>
+              <a:buChar char="•"/>
+            </a:pPr>
+            <a:r>
+              <a:rPr lang="en-US" sz="1200" dirty="0">
+                <a:solidFill>
+                  <a:srgbClr val="1A1A1A"/>
+                </a:solidFill>
+                <a:latin typeface="Georgia" pitchFamily="34" charset="0"/>
+                <a:ea typeface="Georgia" pitchFamily="34" charset="-122"/>
+                <a:cs typeface="Georgia" pitchFamily="34" charset="-120"/>
+              </a:rPr>
+              <a:t>Page count (4.5–5.5 pages target)</a:t>
+            </a:r>
+            <a:endParaRPr lang="en-US" sz="1200" dirty="0"/>
+          </a:p>
+          <a:p>
+            <a:pPr algn="l" marL="342900" indent="-342900">
+              <a:lnSpc>
+                <a:spcPts val="1620"/>
+              </a:lnSpc>
+              <a:spcAft>
+                <a:spcPts val="300"/>
+              </a:spcAft>
+              <a:buSzPct val="100000"/>
+              <a:buChar char="•"/>
+            </a:pPr>
+            <a:r>
+              <a:rPr lang="en-US" sz="1200" dirty="0">
+                <a:solidFill>
+                  <a:srgbClr val="1A1A1A"/>
+                </a:solidFill>
+                <a:latin typeface="Georgia" pitchFamily="34" charset="0"/>
+                <a:ea typeface="Georgia" pitchFamily="34" charset="-122"/>
+                <a:cs typeface="Georgia" pitchFamily="34" charset="-120"/>
+              </a:rPr>
+              <a:t>Works-cited page with at least 3 sources</a:t>
+            </a:r>
+            <a:endParaRPr lang="en-US" sz="1200" dirty="0"/>
+          </a:p>
+          <a:p>
+            <a:pPr algn="l" marL="342900" indent="-342900">
+              <a:lnSpc>
+                <a:spcPts val="1620"/>
+              </a:lnSpc>
+              <a:spcAft>
+                <a:spcPts val="300"/>
+              </a:spcAft>
+              <a:buSzPct val="100000"/>
+              <a:buChar char="•"/>
+            </a:pPr>
+            <a:r>
+              <a:rPr lang="en-US" sz="1200" dirty="0">
+                <a:solidFill>
+                  <a:srgbClr val="1A1A1A"/>
+                </a:solidFill>
+                <a:latin typeface="Georgia" pitchFamily="34" charset="0"/>
+                <a:ea typeface="Georgia" pitchFamily="34" charset="-122"/>
+                <a:cs typeface="Georgia" pitchFamily="34" charset="-120"/>
+              </a:rPr>
+              <a:t>Any paper missing a piece is flagged for late penalty.</a:t>
             </a:r>
             <a:endParaRPr lang="en-US" sz="1200" dirty="0"/>
           </a:p>
@@ -3396,7 +3725,7 @@
                 <a:ea typeface="Times New Roman" pitchFamily="34" charset="-122"/>
                 <a:cs typeface="Times New Roman" pitchFamily="34" charset="-120"/>
               </a:rPr>
-              <a:t>Homework</a:t>
+              <a:t>Wrap-up</a:t>
             </a:r>
             <a:endParaRPr lang="en-US" sz="1800" dirty="0"/>
           </a:p>
@@ -3410,8 +3739,8 @@
         </p:nvSpPr>
         <p:spPr>
           <a:xfrm>
-            <a:off x="406301" y="870942"/>
-            <a:ext cx="8498026" cy="213271"/>
+            <a:off x="634901" y="883593"/>
+            <a:ext cx="8102798" cy="544711"/>
           </a:xfrm>
           <a:prstGeom prst="rect">
             <a:avLst/>
@@ -3423,17 +3752,15 @@
           <a:bodyPr wrap="square" lIns="0" tIns="0" rIns="0" bIns="0" rtlCol="0" anchor="t"/>
           <a:lstStyle/>
           <a:p>
-            <a:pPr algn="l" indent="0" marL="0">
-              <a:lnSpc>
-                <a:spcPts val="1680"/>
-              </a:lnSpc>
-              <a:spcBef>
-                <a:spcPts val="300"/>
-              </a:spcBef>
-              <a:spcAft>
-                <a:spcPts val="300"/>
-              </a:spcAft>
-              <a:buNone/>
+            <a:pPr algn="l" marL="342900" indent="-342900">
+              <a:lnSpc>
+                <a:spcPts val="1620"/>
+              </a:lnSpc>
+              <a:spcAft>
+                <a:spcPts val="300"/>
+              </a:spcAft>
+              <a:buSzPct val="100000"/>
+              <a:buChar char="•"/>
             </a:pPr>
             <a:r>
               <a:rPr lang="en-US" sz="1200" dirty="0">
@@ -3444,7 +3771,71 @@
                 <a:ea typeface="Georgia" pitchFamily="34" charset="-122"/>
                 <a:cs typeface="Georgia" pitchFamily="34" charset="-120"/>
               </a:rPr>
-              <a:t>– None. Module complete. (Paper marked within 1 week.)</a:t>
+              <a:t>Brief class closure.</a:t>
+            </a:r>
+            <a:endParaRPr lang="en-US" sz="1200" dirty="0"/>
+          </a:p>
+          <a:p>
+            <a:pPr algn="l" marL="342900" indent="-342900">
+              <a:lnSpc>
+                <a:spcPts val="1620"/>
+              </a:lnSpc>
+              <a:spcAft>
+                <a:spcPts val="300"/>
+              </a:spcAft>
+              <a:buSzPct val="100000"/>
+              <a:buChar char="•"/>
+            </a:pPr>
+            <a:r>
+              <a:rPr lang="en-US" sz="1200" dirty="0">
+                <a:solidFill>
+                  <a:srgbClr val="1A1A1A"/>
+                </a:solidFill>
+                <a:latin typeface="Georgia" pitchFamily="34" charset="0"/>
+                <a:ea typeface="Georgia" pitchFamily="34" charset="-122"/>
+                <a:cs typeface="Georgia" pitchFamily="34" charset="-120"/>
+              </a:rPr>
+              <a:t>Reflection slip submitted (3 questions from </a:t>
+            </a:r>
+            <a:pPr algn="l" indent="0" marL="0">
+              <a:lnSpc>
+                <a:spcPts val="1620"/>
+              </a:lnSpc>
+              <a:spcAft>
+                <a:spcPts val="300"/>
+              </a:spcAft>
+              <a:buNone/>
+            </a:pPr>
+            <a:r>
+              <a:rPr lang="en-US" sz="1200" dirty="0">
+                <a:solidFill>
+                  <a:srgbClr val="1A1A1A"/>
+                </a:solidFill>
+                <a:latin typeface="Georgia" pitchFamily="34" charset="0"/>
+                <a:ea typeface="Georgia" pitchFamily="34" charset="-122"/>
+                <a:cs typeface="Georgia" pitchFamily="34" charset="-120"/>
+              </a:rPr>
+              <a:t>assessments/project-brief.md</a:t>
+            </a:r>
+            <a:pPr algn="l" indent="0" marL="0">
+              <a:lnSpc>
+                <a:spcPts val="1620"/>
+              </a:lnSpc>
+              <a:spcAft>
+                <a:spcPts val="300"/>
+              </a:spcAft>
+              <a:buNone/>
+            </a:pPr>
+            <a:r>
+              <a:rPr lang="en-US" sz="1200" dirty="0">
+                <a:solidFill>
+                  <a:srgbClr val="1A1A1A"/>
+                </a:solidFill>
+                <a:latin typeface="Georgia" pitchFamily="34" charset="0"/>
+                <a:ea typeface="Georgia" pitchFamily="34" charset="-122"/>
+                <a:cs typeface="Georgia" pitchFamily="34" charset="-120"/>
+              </a:rPr>
+              <a:t>).</a:t>
             </a:r>
             <a:endParaRPr lang="en-US" sz="1200" dirty="0"/>
           </a:p>
@@ -3602,7 +3993,7 @@
                 <a:ea typeface="Times New Roman" pitchFamily="34" charset="-122"/>
                 <a:cs typeface="Times New Roman" pitchFamily="34" charset="-120"/>
               </a:rPr>
-              <a:t>Differentiation</a:t>
+              <a:t>Homework</a:t>
             </a:r>
             <a:endParaRPr lang="en-US" sz="1800" dirty="0"/>
           </a:p>
@@ -3617,7 +4008,7 @@
         <p:spPr>
           <a:xfrm>
             <a:off x="634901" y="883593"/>
-            <a:ext cx="8102798" cy="525661"/>
+            <a:ext cx="8102798" cy="281880"/>
           </a:xfrm>
           <a:prstGeom prst="rect">
             <a:avLst/>
@@ -3640,7 +4031,7 @@
               <a:buChar char="•"/>
             </a:pPr>
             <a:r>
-              <a:rPr lang="en-US" sz="1200" b="1" dirty="0">
+              <a:rPr lang="en-US" sz="1200" dirty="0">
                 <a:solidFill>
                   <a:srgbClr val="1A1A1A"/>
                 </a:solidFill>
@@ -3648,71 +4039,7 @@
                 <a:ea typeface="Georgia" pitchFamily="34" charset="-122"/>
                 <a:cs typeface="Georgia" pitchFamily="34" charset="-120"/>
               </a:rPr>
-              <a:t>Tier up:</a:t>
-            </a:r>
-            <a:pPr algn="l" indent="0" marL="0">
-              <a:lnSpc>
-                <a:spcPts val="1620"/>
-              </a:lnSpc>
-              <a:spcAft>
-                <a:spcPts val="300"/>
-              </a:spcAft>
-              <a:buNone/>
-            </a:pPr>
-            <a:r>
-              <a:rPr lang="en-US" sz="1200" dirty="0">
-                <a:solidFill>
-                  <a:srgbClr val="1A1A1A"/>
-                </a:solidFill>
-                <a:latin typeface="Georgia" pitchFamily="34" charset="0"/>
-                <a:ea typeface="Georgia" pitchFamily="34" charset="-122"/>
-                <a:cs typeface="Georgia" pitchFamily="34" charset="-120"/>
-              </a:rPr>
-              <a:t> Students who submit early can begin reading for the next module's prerequisites.</a:t>
-            </a:r>
-            <a:endParaRPr lang="en-US" sz="1200" dirty="0"/>
-          </a:p>
-          <a:p>
-            <a:pPr algn="l" marL="342900" indent="-342900">
-              <a:lnSpc>
-                <a:spcPts val="1620"/>
-              </a:lnSpc>
-              <a:spcAft>
-                <a:spcPts val="300"/>
-              </a:spcAft>
-              <a:buSzPct val="100000"/>
-              <a:buChar char="•"/>
-            </a:pPr>
-            <a:r>
-              <a:rPr lang="en-US" sz="1200" b="1" dirty="0">
-                <a:solidFill>
-                  <a:srgbClr val="1A1A1A"/>
-                </a:solidFill>
-                <a:latin typeface="Georgia" pitchFamily="34" charset="0"/>
-                <a:ea typeface="Georgia" pitchFamily="34" charset="-122"/>
-                <a:cs typeface="Georgia" pitchFamily="34" charset="-120"/>
-              </a:rPr>
-              <a:t>Tier down:</a:t>
-            </a:r>
-            <a:pPr algn="l" indent="0" marL="0">
-              <a:lnSpc>
-                <a:spcPts val="1620"/>
-              </a:lnSpc>
-              <a:spcAft>
-                <a:spcPts val="300"/>
-              </a:spcAft>
-              <a:buNone/>
-            </a:pPr>
-            <a:r>
-              <a:rPr lang="en-US" sz="1200" dirty="0">
-                <a:solidFill>
-                  <a:srgbClr val="1A1A1A"/>
-                </a:solidFill>
-                <a:latin typeface="Georgia" pitchFamily="34" charset="0"/>
-                <a:ea typeface="Georgia" pitchFamily="34" charset="-122"/>
-                <a:cs typeface="Georgia" pitchFamily="34" charset="-120"/>
-              </a:rPr>
-              <a:t> Open-notebook quiz for documented learning needs.</a:t>
+              <a:t>None. Module complete. (Paper marked within 1 week.)</a:t>
             </a:r>
             <a:endParaRPr lang="en-US" sz="1200" dirty="0"/>
           </a:p>
@@ -3870,7 +4197,7 @@
                 <a:ea typeface="Times New Roman" pitchFamily="34" charset="-122"/>
                 <a:cs typeface="Times New Roman" pitchFamily="34" charset="-120"/>
               </a:rPr>
-              <a:t>Teacher notes</a:t>
+              <a:t>Differentiation</a:t>
             </a:r>
             <a:endParaRPr lang="en-US" sz="1800" dirty="0"/>
           </a:p>
@@ -3884,8 +4211,8 @@
         </p:nvSpPr>
         <p:spPr>
           <a:xfrm>
-            <a:off x="406301" y="870942"/>
-            <a:ext cx="8498026" cy="426541"/>
+            <a:off x="634901" y="883593"/>
+            <a:ext cx="8102798" cy="525661"/>
           </a:xfrm>
           <a:prstGeom prst="rect">
             <a:avLst/>
@@ -3897,20 +4224,18 @@
           <a:bodyPr wrap="square" lIns="0" tIns="0" rIns="0" bIns="0" rtlCol="0" anchor="t"/>
           <a:lstStyle/>
           <a:p>
-            <a:pPr algn="l" indent="0" marL="0">
-              <a:lnSpc>
-                <a:spcPts val="1680"/>
-              </a:lnSpc>
-              <a:spcBef>
-                <a:spcPts val="300"/>
-              </a:spcBef>
-              <a:spcAft>
-                <a:spcPts val="300"/>
-              </a:spcAft>
-              <a:buNone/>
-            </a:pPr>
-            <a:r>
-              <a:rPr lang="en-US" sz="1200" dirty="0">
+            <a:pPr algn="l" marL="342900" indent="-342900">
+              <a:lnSpc>
+                <a:spcPts val="1620"/>
+              </a:lnSpc>
+              <a:spcAft>
+                <a:spcPts val="300"/>
+              </a:spcAft>
+              <a:buSzPct val="100000"/>
+              <a:buChar char="•"/>
+            </a:pPr>
+            <a:r>
+              <a:rPr lang="en-US" sz="1200" b="1" dirty="0">
                 <a:solidFill>
                   <a:srgbClr val="1A1A1A"/>
                 </a:solidFill>
@@ -3918,7 +4243,71 @@
                 <a:ea typeface="Georgia" pitchFamily="34" charset="-122"/>
                 <a:cs typeface="Georgia" pitchFamily="34" charset="-120"/>
               </a:rPr>
-              <a:t>– Mark papers in two passes: first pass for clarity and structure; second pass for source quality and counter-argument fairness. – Return marked papers within 5 school days with detailed comments.</a:t>
+              <a:t>Tier up:</a:t>
+            </a:r>
+            <a:pPr algn="l" indent="0" marL="0">
+              <a:lnSpc>
+                <a:spcPts val="1620"/>
+              </a:lnSpc>
+              <a:spcAft>
+                <a:spcPts val="300"/>
+              </a:spcAft>
+              <a:buNone/>
+            </a:pPr>
+            <a:r>
+              <a:rPr lang="en-US" sz="1200" dirty="0">
+                <a:solidFill>
+                  <a:srgbClr val="1A1A1A"/>
+                </a:solidFill>
+                <a:latin typeface="Georgia" pitchFamily="34" charset="0"/>
+                <a:ea typeface="Georgia" pitchFamily="34" charset="-122"/>
+                <a:cs typeface="Georgia" pitchFamily="34" charset="-120"/>
+              </a:rPr>
+              <a:t> Students who submit early can begin reading for the next module's prerequisites.</a:t>
+            </a:r>
+            <a:endParaRPr lang="en-US" sz="1200" dirty="0"/>
+          </a:p>
+          <a:p>
+            <a:pPr algn="l" marL="342900" indent="-342900">
+              <a:lnSpc>
+                <a:spcPts val="1620"/>
+              </a:lnSpc>
+              <a:spcAft>
+                <a:spcPts val="300"/>
+              </a:spcAft>
+              <a:buSzPct val="100000"/>
+              <a:buChar char="•"/>
+            </a:pPr>
+            <a:r>
+              <a:rPr lang="en-US" sz="1200" b="1" dirty="0">
+                <a:solidFill>
+                  <a:srgbClr val="1A1A1A"/>
+                </a:solidFill>
+                <a:latin typeface="Georgia" pitchFamily="34" charset="0"/>
+                <a:ea typeface="Georgia" pitchFamily="34" charset="-122"/>
+                <a:cs typeface="Georgia" pitchFamily="34" charset="-120"/>
+              </a:rPr>
+              <a:t>Tier down:</a:t>
+            </a:r>
+            <a:pPr algn="l" indent="0" marL="0">
+              <a:lnSpc>
+                <a:spcPts val="1620"/>
+              </a:lnSpc>
+              <a:spcAft>
+                <a:spcPts val="300"/>
+              </a:spcAft>
+              <a:buNone/>
+            </a:pPr>
+            <a:r>
+              <a:rPr lang="en-US" sz="1200" dirty="0">
+                <a:solidFill>
+                  <a:srgbClr val="1A1A1A"/>
+                </a:solidFill>
+                <a:latin typeface="Georgia" pitchFamily="34" charset="0"/>
+                <a:ea typeface="Georgia" pitchFamily="34" charset="-122"/>
+                <a:cs typeface="Georgia" pitchFamily="34" charset="-120"/>
+              </a:rPr>
+              <a:t> Open-notebook quiz for documented learning needs.</a:t>
             </a:r>
             <a:endParaRPr lang="en-US" sz="1200" dirty="0"/>
           </a:p>
